--- a/AI-tools/AI-Talk-LessTechnical/AI-8-TraditionalAlgorithm_vs_AI_Algorithm.pptx
+++ b/AI-tools/AI-Talk-LessTechnical/AI-8-TraditionalAlgorithm_vs_AI_Algorithm.pptx
@@ -5,10 +5,10 @@
     <p:sldMasterId id="2147483648" r:id="rId1"/>
   </p:sldMasterIdLst>
   <p:notesMasterIdLst>
-    <p:notesMasterId r:id="rId24"/>
+    <p:notesMasterId r:id="rId25"/>
   </p:notesMasterIdLst>
   <p:handoutMasterIdLst>
-    <p:handoutMasterId r:id="rId25"/>
+    <p:handoutMasterId r:id="rId26"/>
   </p:handoutMasterIdLst>
   <p:sldIdLst>
     <p:sldId id="276" r:id="rId2"/>
@@ -27,12 +27,13 @@
     <p:sldId id="287" r:id="rId15"/>
     <p:sldId id="288" r:id="rId16"/>
     <p:sldId id="289" r:id="rId17"/>
-    <p:sldId id="290" r:id="rId18"/>
-    <p:sldId id="291" r:id="rId19"/>
-    <p:sldId id="292" r:id="rId20"/>
-    <p:sldId id="293" r:id="rId21"/>
-    <p:sldId id="294" r:id="rId22"/>
-    <p:sldId id="295" r:id="rId23"/>
+    <p:sldId id="296" r:id="rId18"/>
+    <p:sldId id="290" r:id="rId19"/>
+    <p:sldId id="291" r:id="rId20"/>
+    <p:sldId id="292" r:id="rId21"/>
+    <p:sldId id="293" r:id="rId22"/>
+    <p:sldId id="294" r:id="rId23"/>
+    <p:sldId id="295" r:id="rId24"/>
   </p:sldIdLst>
   <p:sldSz cx="12192000" cy="6858000"/>
   <p:notesSz cx="6858000" cy="9144000"/>
@@ -236,7 +237,7 @@
           <a:p>
             <a:fld id="{7BAEECA8-D063-486F-AE31-5020270C1449}" type="datetimeFigureOut">
               <a:rPr lang="en-US" smtClean="0"/>
-              <a:t>5/24/2026</a:t>
+              <a:t>6/23/2026</a:t>
             </a:fld>
             <a:endParaRPr lang="en-US"/>
           </a:p>
@@ -413,7 +414,7 @@
           <a:p>
             <a:fld id="{CB233BD1-3BA8-448D-9D08-7846095EA517}" type="datetimeFigureOut">
               <a:rPr lang="en-US" smtClean="0"/>
-              <a:t>5/24/2026</a:t>
+              <a:t>6/23/2026</a:t>
             </a:fld>
             <a:endParaRPr lang="en-US"/>
           </a:p>
@@ -827,7 +828,7 @@
           <a:p>
             <a:fld id="{6383FAE1-13DE-4511-8C1B-C8AFB720664C}" type="datetimeFigureOut">
               <a:rPr lang="en-US" smtClean="0"/>
-              <a:t>5/24/2026</a:t>
+              <a:t>6/23/2026</a:t>
             </a:fld>
             <a:endParaRPr lang="en-US"/>
           </a:p>
@@ -1025,7 +1026,7 @@
           <a:p>
             <a:fld id="{6383FAE1-13DE-4511-8C1B-C8AFB720664C}" type="datetimeFigureOut">
               <a:rPr lang="en-US" smtClean="0"/>
-              <a:t>5/24/2026</a:t>
+              <a:t>6/23/2026</a:t>
             </a:fld>
             <a:endParaRPr lang="en-US"/>
           </a:p>
@@ -1233,7 +1234,7 @@
           <a:p>
             <a:fld id="{6383FAE1-13DE-4511-8C1B-C8AFB720664C}" type="datetimeFigureOut">
               <a:rPr lang="en-US" smtClean="0"/>
-              <a:t>5/24/2026</a:t>
+              <a:t>6/23/2026</a:t>
             </a:fld>
             <a:endParaRPr lang="en-US"/>
           </a:p>
@@ -1431,7 +1432,7 @@
           <a:p>
             <a:fld id="{6383FAE1-13DE-4511-8C1B-C8AFB720664C}" type="datetimeFigureOut">
               <a:rPr lang="en-US" smtClean="0"/>
-              <a:t>5/24/2026</a:t>
+              <a:t>6/23/2026</a:t>
             </a:fld>
             <a:endParaRPr lang="en-US"/>
           </a:p>
@@ -1706,7 +1707,7 @@
           <a:p>
             <a:fld id="{6383FAE1-13DE-4511-8C1B-C8AFB720664C}" type="datetimeFigureOut">
               <a:rPr lang="en-US" smtClean="0"/>
-              <a:t>5/24/2026</a:t>
+              <a:t>6/23/2026</a:t>
             </a:fld>
             <a:endParaRPr lang="en-US"/>
           </a:p>
@@ -1971,7 +1972,7 @@
           <a:p>
             <a:fld id="{6383FAE1-13DE-4511-8C1B-C8AFB720664C}" type="datetimeFigureOut">
               <a:rPr lang="en-US" smtClean="0"/>
-              <a:t>5/24/2026</a:t>
+              <a:t>6/23/2026</a:t>
             </a:fld>
             <a:endParaRPr lang="en-US"/>
           </a:p>
@@ -2383,7 +2384,7 @@
           <a:p>
             <a:fld id="{6383FAE1-13DE-4511-8C1B-C8AFB720664C}" type="datetimeFigureOut">
               <a:rPr lang="en-US" smtClean="0"/>
-              <a:t>5/24/2026</a:t>
+              <a:t>6/23/2026</a:t>
             </a:fld>
             <a:endParaRPr lang="en-US"/>
           </a:p>
@@ -2524,7 +2525,7 @@
           <a:p>
             <a:fld id="{6383FAE1-13DE-4511-8C1B-C8AFB720664C}" type="datetimeFigureOut">
               <a:rPr lang="en-US" smtClean="0"/>
-              <a:t>5/24/2026</a:t>
+              <a:t>6/23/2026</a:t>
             </a:fld>
             <a:endParaRPr lang="en-US"/>
           </a:p>
@@ -2637,7 +2638,7 @@
           <a:p>
             <a:fld id="{6383FAE1-13DE-4511-8C1B-C8AFB720664C}" type="datetimeFigureOut">
               <a:rPr lang="en-US" smtClean="0"/>
-              <a:t>5/24/2026</a:t>
+              <a:t>6/23/2026</a:t>
             </a:fld>
             <a:endParaRPr lang="en-US"/>
           </a:p>
@@ -2948,7 +2949,7 @@
           <a:p>
             <a:fld id="{6383FAE1-13DE-4511-8C1B-C8AFB720664C}" type="datetimeFigureOut">
               <a:rPr lang="en-US" smtClean="0"/>
-              <a:t>5/24/2026</a:t>
+              <a:t>6/23/2026</a:t>
             </a:fld>
             <a:endParaRPr lang="en-US"/>
           </a:p>
@@ -3239,7 +3240,7 @@
           <a:p>
             <a:fld id="{6383FAE1-13DE-4511-8C1B-C8AFB720664C}" type="datetimeFigureOut">
               <a:rPr lang="en-US" smtClean="0"/>
-              <a:t>5/24/2026</a:t>
+              <a:t>6/23/2026</a:t>
             </a:fld>
             <a:endParaRPr lang="en-US"/>
           </a:p>
@@ -3483,7 +3484,7 @@
           <a:p>
             <a:fld id="{6383FAE1-13DE-4511-8C1B-C8AFB720664C}" type="datetimeFigureOut">
               <a:rPr lang="en-US" smtClean="0"/>
-              <a:t>5/24/2026</a:t>
+              <a:t>6/23/2026</a:t>
             </a:fld>
             <a:endParaRPr lang="en-US"/>
           </a:p>
@@ -4876,6 +4877,356 @@
         <p:cNvPr id="1" name="">
           <a:extLst>
             <a:ext uri="{FF2B5EF4-FFF2-40B4-BE49-F238E27FC236}">
+              <a16:creationId xmlns:a16="http://schemas.microsoft.com/office/drawing/2014/main" id="{1C3E843C-EA93-DD66-C4E1-F4E253D00C4C}"/>
+            </a:ext>
+          </a:extLst>
+        </p:cNvPr>
+        <p:cNvGrpSpPr/>
+        <p:nvPr/>
+      </p:nvGrpSpPr>
+      <p:grpSpPr>
+        <a:xfrm>
+          <a:off x="0" y="0"/>
+          <a:ext cx="0" cy="0"/>
+          <a:chOff x="0" y="0"/>
+          <a:chExt cx="0" cy="0"/>
+        </a:xfrm>
+      </p:grpSpPr>
+      <p:sp>
+        <p:nvSpPr>
+          <p:cNvPr id="4" name="TextBox 3">
+            <a:extLst>
+              <a:ext uri="{FF2B5EF4-FFF2-40B4-BE49-F238E27FC236}">
+                <a16:creationId xmlns:a16="http://schemas.microsoft.com/office/drawing/2014/main" id="{9867867F-6914-AB9D-B260-8F310E83D778}"/>
+              </a:ext>
+            </a:extLst>
+          </p:cNvPr>
+          <p:cNvSpPr txBox="1"/>
+          <p:nvPr/>
+        </p:nvSpPr>
+        <p:spPr>
+          <a:xfrm>
+            <a:off x="292608" y="146423"/>
+            <a:ext cx="11512296" cy="6001643"/>
+          </a:xfrm>
+          <a:prstGeom prst="rect">
+            <a:avLst/>
+          </a:prstGeom>
+          <a:noFill/>
+        </p:spPr>
+        <p:txBody>
+          <a:bodyPr wrap="square">
+            <a:spAutoFit/>
+          </a:bodyPr>
+          <a:lstStyle/>
+          <a:p>
+            <a:pPr lvl="0"/>
+            <a:r>
+              <a:rPr lang="en-US" sz="2400" b="1" dirty="0">
+                <a:solidFill>
+                  <a:schemeClr val="accent6">
+                    <a:lumMod val="60000"/>
+                    <a:lumOff val="40000"/>
+                  </a:schemeClr>
+                </a:solidFill>
+              </a:rPr>
+              <a:t>2. Patterns are subtle or hidden</a:t>
+            </a:r>
+            <a:r>
+              <a:rPr lang="en-US" sz="2400" dirty="0">
+                <a:solidFill>
+                  <a:schemeClr val="accent6">
+                    <a:lumMod val="60000"/>
+                    <a:lumOff val="40000"/>
+                  </a:schemeClr>
+                </a:solidFill>
+              </a:rPr>
+              <a:t> within vast amounts of data</a:t>
+            </a:r>
+          </a:p>
+          <a:p>
+            <a:endParaRPr lang="en-US" sz="2400" b="1" dirty="0">
+              <a:solidFill>
+                <a:schemeClr val="accent6">
+                  <a:lumMod val="60000"/>
+                  <a:lumOff val="40000"/>
+                </a:schemeClr>
+              </a:solidFill>
+            </a:endParaRPr>
+          </a:p>
+          <a:p>
+            <a:r>
+              <a:rPr lang="en-US" sz="2400" b="1" dirty="0">
+                <a:solidFill>
+                  <a:schemeClr val="accent6">
+                    <a:lumMod val="60000"/>
+                    <a:lumOff val="40000"/>
+                  </a:schemeClr>
+                </a:solidFill>
+              </a:rPr>
+              <a:t>Example:  Predictive maintenance:</a:t>
+            </a:r>
+            <a:r>
+              <a:rPr lang="en-US" sz="2400" dirty="0">
+                <a:solidFill>
+                  <a:schemeClr val="accent6">
+                    <a:lumMod val="60000"/>
+                    <a:lumOff val="40000"/>
+                  </a:schemeClr>
+                </a:solidFill>
+              </a:rPr>
+              <a:t> </a:t>
+            </a:r>
+          </a:p>
+          <a:p>
+            <a:r>
+              <a:rPr lang="en-US" sz="2400" dirty="0">
+                <a:solidFill>
+                  <a:schemeClr val="accent6">
+                    <a:lumMod val="60000"/>
+                    <a:lumOff val="40000"/>
+                  </a:schemeClr>
+                </a:solidFill>
+              </a:rPr>
+              <a:t>Machines give off subtle signals --</a:t>
+            </a:r>
+          </a:p>
+          <a:p>
+            <a:pPr marL="342900" indent="-342900">
+              <a:buFont typeface="Arial" panose="020B0604020202020204" pitchFamily="34" charset="0"/>
+              <a:buChar char="•"/>
+            </a:pPr>
+            <a:r>
+              <a:rPr lang="en-US" sz="2400" dirty="0">
+                <a:solidFill>
+                  <a:schemeClr val="accent6">
+                    <a:lumMod val="60000"/>
+                    <a:lumOff val="40000"/>
+                  </a:schemeClr>
+                </a:solidFill>
+              </a:rPr>
+              <a:t>vibration,</a:t>
+            </a:r>
+          </a:p>
+          <a:p>
+            <a:pPr marL="342900" indent="-342900">
+              <a:buFont typeface="Arial" panose="020B0604020202020204" pitchFamily="34" charset="0"/>
+              <a:buChar char="•"/>
+            </a:pPr>
+            <a:r>
+              <a:rPr lang="en-US" sz="2400" dirty="0">
+                <a:solidFill>
+                  <a:schemeClr val="accent6">
+                    <a:lumMod val="60000"/>
+                    <a:lumOff val="40000"/>
+                  </a:schemeClr>
+                </a:solidFill>
+              </a:rPr>
+              <a:t>temperature, </a:t>
+            </a:r>
+          </a:p>
+          <a:p>
+            <a:pPr marL="342900" indent="-342900">
+              <a:buFont typeface="Arial" panose="020B0604020202020204" pitchFamily="34" charset="0"/>
+              <a:buChar char="•"/>
+            </a:pPr>
+            <a:r>
+              <a:rPr lang="en-US" sz="2400" dirty="0">
+                <a:solidFill>
+                  <a:schemeClr val="accent6">
+                    <a:lumMod val="60000"/>
+                    <a:lumOff val="40000"/>
+                  </a:schemeClr>
+                </a:solidFill>
+              </a:rPr>
+              <a:t>steady increase in current usage, etc. </a:t>
+            </a:r>
+          </a:p>
+          <a:p>
+            <a:r>
+              <a:rPr lang="en-US" sz="2400" dirty="0">
+                <a:solidFill>
+                  <a:schemeClr val="accent6">
+                    <a:lumMod val="60000"/>
+                    <a:lumOff val="40000"/>
+                  </a:schemeClr>
+                </a:solidFill>
+              </a:rPr>
+              <a:t>before failure. </a:t>
+            </a:r>
+          </a:p>
+          <a:p>
+            <a:r>
+              <a:rPr lang="en-US" sz="2400" dirty="0">
+                <a:solidFill>
+                  <a:schemeClr val="accent6">
+                    <a:lumMod val="60000"/>
+                    <a:lumOff val="40000"/>
+                  </a:schemeClr>
+                </a:solidFill>
+              </a:rPr>
+              <a:t>ML models can detect </a:t>
+            </a:r>
+            <a:r>
+              <a:rPr lang="en-US" sz="2400" b="1" dirty="0">
+                <a:solidFill>
+                  <a:schemeClr val="accent6">
+                    <a:lumMod val="60000"/>
+                    <a:lumOff val="40000"/>
+                  </a:schemeClr>
+                </a:solidFill>
+              </a:rPr>
+              <a:t>trends</a:t>
+            </a:r>
+            <a:r>
+              <a:rPr lang="en-US" sz="2400" dirty="0">
+                <a:solidFill>
+                  <a:schemeClr val="accent6">
+                    <a:lumMod val="60000"/>
+                    <a:lumOff val="40000"/>
+                  </a:schemeClr>
+                </a:solidFill>
+              </a:rPr>
+              <a:t> and </a:t>
+            </a:r>
+            <a:r>
+              <a:rPr lang="en-US" sz="2400" b="1" dirty="0">
+                <a:solidFill>
+                  <a:schemeClr val="accent6">
+                    <a:lumMod val="60000"/>
+                    <a:lumOff val="40000"/>
+                  </a:schemeClr>
+                </a:solidFill>
+              </a:rPr>
+              <a:t>predict breakdowns </a:t>
+            </a:r>
+            <a:r>
+              <a:rPr lang="en-US" sz="2400" dirty="0">
+                <a:solidFill>
+                  <a:schemeClr val="accent6">
+                    <a:lumMod val="60000"/>
+                    <a:lumOff val="40000"/>
+                  </a:schemeClr>
+                </a:solidFill>
+              </a:rPr>
+              <a:t>earlier than rule-based thresholds</a:t>
+            </a:r>
+          </a:p>
+          <a:p>
+            <a:endParaRPr lang="en-US" sz="2400" dirty="0">
+              <a:solidFill>
+                <a:schemeClr val="accent6">
+                  <a:lumMod val="60000"/>
+                  <a:lumOff val="40000"/>
+                </a:schemeClr>
+              </a:solidFill>
+            </a:endParaRPr>
+          </a:p>
+          <a:p>
+            <a:endParaRPr lang="en-US" sz="2400" dirty="0">
+              <a:solidFill>
+                <a:schemeClr val="accent6">
+                  <a:lumMod val="60000"/>
+                  <a:lumOff val="40000"/>
+                </a:schemeClr>
+              </a:solidFill>
+            </a:endParaRPr>
+          </a:p>
+          <a:p>
+            <a:r>
+              <a:rPr lang="en-US" sz="2400" b="1" dirty="0">
+                <a:solidFill>
+                  <a:schemeClr val="accent6">
+                    <a:lumMod val="60000"/>
+                    <a:lumOff val="40000"/>
+                  </a:schemeClr>
+                </a:solidFill>
+              </a:rPr>
+              <a:t>Real-World Success:</a:t>
+            </a:r>
+            <a:endParaRPr lang="en-US" sz="2400" dirty="0">
+              <a:solidFill>
+                <a:schemeClr val="accent6">
+                  <a:lumMod val="60000"/>
+                  <a:lumOff val="40000"/>
+                </a:schemeClr>
+              </a:solidFill>
+            </a:endParaRPr>
+          </a:p>
+          <a:p>
+            <a:pPr marL="342900" indent="-342900">
+              <a:buFont typeface="Arial" panose="020B0604020202020204" pitchFamily="34" charset="0"/>
+              <a:buChar char="•"/>
+            </a:pPr>
+            <a:r>
+              <a:rPr lang="en-US" sz="2400" dirty="0">
+                <a:solidFill>
+                  <a:schemeClr val="accent6">
+                    <a:lumMod val="60000"/>
+                    <a:lumOff val="40000"/>
+                  </a:schemeClr>
+                </a:solidFill>
+              </a:rPr>
+              <a:t>GE reduced unplanned downtime by 20% in power plants using ML-based predictive maintenance</a:t>
+            </a:r>
+          </a:p>
+          <a:p>
+            <a:pPr marL="342900" indent="-342900">
+              <a:buFont typeface="Arial" panose="020B0604020202020204" pitchFamily="34" charset="0"/>
+              <a:buChar char="•"/>
+            </a:pPr>
+            <a:r>
+              <a:rPr lang="en-US" sz="2400" dirty="0">
+                <a:solidFill>
+                  <a:schemeClr val="accent6">
+                    <a:lumMod val="60000"/>
+                    <a:lumOff val="40000"/>
+                  </a:schemeClr>
+                </a:solidFill>
+              </a:rPr>
+              <a:t>Mining companies reduced equipment failures by 25% using sensor data and ML</a:t>
+            </a:r>
+          </a:p>
+          <a:p>
+            <a:pPr marL="342900" indent="-342900">
+              <a:buFont typeface="Arial" panose="020B0604020202020204" pitchFamily="34" charset="0"/>
+              <a:buChar char="•"/>
+            </a:pPr>
+            <a:r>
+              <a:rPr lang="en-US" sz="2400" dirty="0">
+                <a:solidFill>
+                  <a:schemeClr val="accent6">
+                    <a:lumMod val="60000"/>
+                    <a:lumOff val="40000"/>
+                  </a:schemeClr>
+                </a:solidFill>
+              </a:rPr>
+              <a:t>Airlines reduced delays and cancellations</a:t>
+            </a:r>
+          </a:p>
+        </p:txBody>
+      </p:sp>
+    </p:spTree>
+    <p:extLst>
+      <p:ext uri="{BB962C8B-B14F-4D97-AF65-F5344CB8AC3E}">
+        <p14:creationId xmlns:p14="http://schemas.microsoft.com/office/powerpoint/2010/main" val="2030977792"/>
+      </p:ext>
+    </p:extLst>
+  </p:cSld>
+  <p:clrMapOvr>
+    <a:masterClrMapping/>
+  </p:clrMapOvr>
+</p:sld>
+</file>
+
+<file path=ppt/slides/slide18.xml><?xml version="1.0" encoding="utf-8"?>
+<p:sld xmlns:a="http://schemas.openxmlformats.org/drawingml/2006/main" xmlns:r="http://schemas.openxmlformats.org/officeDocument/2006/relationships" xmlns:p="http://schemas.openxmlformats.org/presentationml/2006/main">
+  <p:cSld>
+    <p:spTree>
+      <p:nvGrpSpPr>
+        <p:cNvPr id="1" name="">
+          <a:extLst>
+            <a:ext uri="{FF2B5EF4-FFF2-40B4-BE49-F238E27FC236}">
               <a16:creationId xmlns:a16="http://schemas.microsoft.com/office/drawing/2014/main" id="{ADAC9D51-E150-7A88-6AC0-3A0F4AAB0AC2}"/>
             </a:ext>
           </a:extLst>
@@ -4906,7 +5257,7 @@
         <p:spPr>
           <a:xfrm>
             <a:off x="292608" y="146423"/>
-            <a:ext cx="11512296" cy="5262979"/>
+            <a:ext cx="11512296" cy="4524315"/>
           </a:xfrm>
           <a:prstGeom prst="rect">
             <a:avLst/>
@@ -4963,20 +5314,7 @@
                   </a:schemeClr>
                 </a:solidFill>
               </a:rPr>
-              <a:t>Example: </a:t>
-            </a:r>
-          </a:p>
-          <a:p>
-            <a:r>
-              <a:rPr lang="en-US" sz="2400" b="1" dirty="0">
-                <a:solidFill>
-                  <a:schemeClr val="accent6">
-                    <a:lumMod val="60000"/>
-                    <a:lumOff val="40000"/>
-                  </a:schemeClr>
-                </a:solidFill>
-              </a:rPr>
-              <a:t>Detecting fraudulent transactions in banking</a:t>
+              <a:t>Example: Detecting fraudulent transactions in banking</a:t>
             </a:r>
             <a:br>
               <a:rPr lang="en-US" sz="2400" dirty="0">
@@ -5001,7 +5339,7 @@
             </a:r>
           </a:p>
           <a:p>
-            <a:endParaRPr lang="en-US" sz="2400" b="1" dirty="0">
+            <a:endParaRPr lang="en-US" sz="2400" dirty="0">
               <a:solidFill>
                 <a:schemeClr val="accent6">
                   <a:lumMod val="60000"/>
@@ -5011,7 +5349,18 @@
             </a:endParaRPr>
           </a:p>
           <a:p>
-            <a:endParaRPr lang="en-US" sz="2400" b="1" dirty="0">
+            <a:r>
+              <a:rPr lang="en-US" sz="2400" b="1" dirty="0">
+                <a:solidFill>
+                  <a:schemeClr val="accent6">
+                    <a:lumMod val="60000"/>
+                    <a:lumOff val="40000"/>
+                  </a:schemeClr>
+                </a:solidFill>
+              </a:rPr>
+              <a:t>Real-World Success:</a:t>
+            </a:r>
+            <a:endParaRPr lang="en-US" sz="2400" dirty="0">
               <a:solidFill>
                 <a:schemeClr val="accent6">
                   <a:lumMod val="60000"/>
@@ -5021,40 +5370,10 @@
             </a:endParaRPr>
           </a:p>
           <a:p>
-            <a:endParaRPr lang="en-US" sz="2400" b="1" dirty="0">
-              <a:solidFill>
-                <a:schemeClr val="accent6">
-                  <a:lumMod val="60000"/>
-                  <a:lumOff val="40000"/>
-                </a:schemeClr>
-              </a:solidFill>
-            </a:endParaRPr>
-          </a:p>
-          <a:p>
-            <a:r>
-              <a:rPr lang="en-US" sz="2400" b="1" dirty="0">
-                <a:solidFill>
-                  <a:schemeClr val="accent6">
-                    <a:lumMod val="60000"/>
-                    <a:lumOff val="40000"/>
-                  </a:schemeClr>
-                </a:solidFill>
-              </a:rPr>
-              <a:t>Example: </a:t>
-            </a:r>
-          </a:p>
-          <a:p>
-            <a:r>
-              <a:rPr lang="en-US" sz="2400" b="1" dirty="0">
-                <a:solidFill>
-                  <a:schemeClr val="accent6">
-                    <a:lumMod val="60000"/>
-                    <a:lumOff val="40000"/>
-                  </a:schemeClr>
-                </a:solidFill>
-              </a:rPr>
-              <a:t>Predictive maintenance:</a:t>
-            </a:r>
+            <a:pPr marL="342900" indent="-342900">
+              <a:buFont typeface="Arial" panose="020B0604020202020204" pitchFamily="34" charset="0"/>
+              <a:buChar char="•"/>
+            </a:pPr>
             <a:r>
               <a:rPr lang="en-US" sz="2400" dirty="0">
                 <a:solidFill>
@@ -5064,10 +5383,14 @@
                   </a:schemeClr>
                 </a:solidFill>
               </a:rPr>
-              <a:t> </a:t>
-            </a:r>
-          </a:p>
-          <a:p>
+              <a:t>PayPal's fraud detection system (reduced fraud rates by 10% while improving customer experience)</a:t>
+            </a:r>
+          </a:p>
+          <a:p>
+            <a:pPr marL="342900" indent="-342900">
+              <a:buFont typeface="Arial" panose="020B0604020202020204" pitchFamily="34" charset="0"/>
+              <a:buChar char="•"/>
+            </a:pPr>
             <a:r>
               <a:rPr lang="en-US" sz="2400" dirty="0">
                 <a:solidFill>
@@ -5077,19 +5400,14 @@
                   </a:schemeClr>
                 </a:solidFill>
               </a:rPr>
-              <a:t>Machines give off subtle signals (vibration, temperature, steady increase in current usage ,etc.) before failure. ML models can detect </a:t>
-            </a:r>
-            <a:r>
-              <a:rPr lang="en-US" sz="2400" b="1" dirty="0">
-                <a:solidFill>
-                  <a:schemeClr val="accent6">
-                    <a:lumMod val="60000"/>
-                    <a:lumOff val="40000"/>
-                  </a:schemeClr>
-                </a:solidFill>
-              </a:rPr>
-              <a:t>trends</a:t>
-            </a:r>
+              <a:t>Credit card companies' real-time fraud alerts (detecting subtle pattern changes)</a:t>
+            </a:r>
+          </a:p>
+          <a:p>
+            <a:pPr marL="342900" indent="-342900">
+              <a:buFont typeface="Arial" panose="020B0604020202020204" pitchFamily="34" charset="0"/>
+              <a:buChar char="•"/>
+            </a:pPr>
             <a:r>
               <a:rPr lang="en-US" sz="2400" dirty="0">
                 <a:solidFill>
@@ -5099,29 +5417,7 @@
                   </a:schemeClr>
                 </a:solidFill>
               </a:rPr>
-              <a:t> and </a:t>
-            </a:r>
-            <a:r>
-              <a:rPr lang="en-US" sz="2400" b="1" dirty="0">
-                <a:solidFill>
-                  <a:schemeClr val="accent6">
-                    <a:lumMod val="60000"/>
-                    <a:lumOff val="40000"/>
-                  </a:schemeClr>
-                </a:solidFill>
-              </a:rPr>
-              <a:t>predict breakdowns </a:t>
-            </a:r>
-            <a:r>
-              <a:rPr lang="en-US" sz="2400" dirty="0">
-                <a:solidFill>
-                  <a:schemeClr val="accent6">
-                    <a:lumMod val="60000"/>
-                    <a:lumOff val="40000"/>
-                  </a:schemeClr>
-                </a:solidFill>
-              </a:rPr>
-              <a:t>earlier than rule-based thresholds</a:t>
+              <a:t>Insurance claim fraud detection (identifying connections between seemingly unrelated claims)</a:t>
             </a:r>
           </a:p>
         </p:txBody>
@@ -5139,7 +5435,7 @@
 </p:sld>
 </file>
 
-<file path=ppt/slides/slide18.xml><?xml version="1.0" encoding="utf-8"?>
+<file path=ppt/slides/slide19.xml><?xml version="1.0" encoding="utf-8"?>
 <p:sld xmlns:a="http://schemas.openxmlformats.org/drawingml/2006/main" xmlns:r="http://schemas.openxmlformats.org/officeDocument/2006/relationships" xmlns:p="http://schemas.openxmlformats.org/presentationml/2006/main">
   <p:cSld>
     <p:spTree>
@@ -5231,7 +5527,7 @@
         <p:spPr>
           <a:xfrm>
             <a:off x="6301740" y="906200"/>
-            <a:ext cx="5890260" cy="1938992"/>
+            <a:ext cx="5890260" cy="3046988"/>
           </a:xfrm>
           <a:prstGeom prst="rect">
             <a:avLst/>
@@ -5286,7 +5582,97 @@
                   </a:schemeClr>
                 </a:solidFill>
               </a:rPr>
-              <a:t>Understanding context, sentiment, and meaning in text. It's nearly impossible to write deterministic rules for sarcasm, sentiment, grammar, or slang</a:t>
+              <a:t>Understanding context, sentiment, and meaning in text. It's nearly </a:t>
+            </a:r>
+            <a:r>
+              <a:rPr lang="en-US" sz="2400" b="1" dirty="0">
+                <a:solidFill>
+                  <a:schemeClr val="accent6">
+                    <a:lumMod val="60000"/>
+                    <a:lumOff val="40000"/>
+                  </a:schemeClr>
+                </a:solidFill>
+              </a:rPr>
+              <a:t>impossible to write deterministic rules </a:t>
+            </a:r>
+            <a:r>
+              <a:rPr lang="en-US" sz="2400" dirty="0">
+                <a:solidFill>
+                  <a:schemeClr val="accent6">
+                    <a:lumMod val="60000"/>
+                    <a:lumOff val="40000"/>
+                  </a:schemeClr>
+                </a:solidFill>
+              </a:rPr>
+              <a:t>for </a:t>
+            </a:r>
+          </a:p>
+          <a:p>
+            <a:pPr marL="342900" indent="-342900">
+              <a:buFont typeface="Arial" panose="020B0604020202020204" pitchFamily="34" charset="0"/>
+              <a:buChar char="•"/>
+            </a:pPr>
+            <a:r>
+              <a:rPr lang="en-US" sz="2400" dirty="0">
+                <a:solidFill>
+                  <a:schemeClr val="accent6">
+                    <a:lumMod val="60000"/>
+                    <a:lumOff val="40000"/>
+                  </a:schemeClr>
+                </a:solidFill>
+              </a:rPr>
+              <a:t>sarcasm, </a:t>
+            </a:r>
+          </a:p>
+          <a:p>
+            <a:pPr marL="342900" indent="-342900">
+              <a:buFont typeface="Arial" panose="020B0604020202020204" pitchFamily="34" charset="0"/>
+              <a:buChar char="•"/>
+            </a:pPr>
+            <a:r>
+              <a:rPr lang="en-US" sz="2400" dirty="0">
+                <a:solidFill>
+                  <a:schemeClr val="accent6">
+                    <a:lumMod val="60000"/>
+                    <a:lumOff val="40000"/>
+                  </a:schemeClr>
+                </a:solidFill>
+              </a:rPr>
+              <a:t>sentiment, </a:t>
+            </a:r>
+          </a:p>
+          <a:p>
+            <a:pPr marL="342900" indent="-342900">
+              <a:buFont typeface="Arial" panose="020B0604020202020204" pitchFamily="34" charset="0"/>
+              <a:buChar char="•"/>
+            </a:pPr>
+            <a:r>
+              <a:rPr lang="en-US" sz="2400" dirty="0">
+                <a:solidFill>
+                  <a:schemeClr val="accent6">
+                    <a:lumMod val="60000"/>
+                    <a:lumOff val="40000"/>
+                  </a:schemeClr>
+                </a:solidFill>
+              </a:rPr>
+              <a:t>grammar, or</a:t>
+            </a:r>
+          </a:p>
+          <a:p>
+            <a:pPr marL="342900" indent="-342900">
+              <a:buFont typeface="Arial" panose="020B0604020202020204" pitchFamily="34" charset="0"/>
+              <a:buChar char="•"/>
+            </a:pPr>
+            <a:r>
+              <a:rPr lang="en-US" sz="2400" dirty="0">
+                <a:solidFill>
+                  <a:schemeClr val="accent6">
+                    <a:lumMod val="60000"/>
+                    <a:lumOff val="40000"/>
+                  </a:schemeClr>
+                </a:solidFill>
+              </a:rPr>
+              <a:t>slang</a:t>
             </a:r>
           </a:p>
         </p:txBody>
@@ -5341,7 +5727,29 @@
                   </a:schemeClr>
                 </a:solidFill>
               </a:rPr>
-              <a:t>We can’t write explicit rules to define every possible human face, but we can train a model on millions of labeled images to recognize faces effectively.</a:t>
+              <a:t>We </a:t>
+            </a:r>
+            <a:r>
+              <a:rPr lang="en-US" sz="2400" b="1" dirty="0">
+                <a:solidFill>
+                  <a:schemeClr val="accent6">
+                    <a:lumMod val="60000"/>
+                    <a:lumOff val="40000"/>
+                  </a:schemeClr>
+                </a:solidFill>
+              </a:rPr>
+              <a:t>can’t write explicit rules </a:t>
+            </a:r>
+            <a:r>
+              <a:rPr lang="en-US" sz="2400" dirty="0">
+                <a:solidFill>
+                  <a:schemeClr val="accent6">
+                    <a:lumMod val="60000"/>
+                    <a:lumOff val="40000"/>
+                  </a:schemeClr>
+                </a:solidFill>
+              </a:rPr>
+              <a:t>to define every possible human face, but we can train a model on millions of labeled images to recognize faces effectively.</a:t>
             </a:r>
           </a:p>
         </p:txBody>
@@ -5350,150 +5758,6 @@
     <p:extLst>
       <p:ext uri="{BB962C8B-B14F-4D97-AF65-F5344CB8AC3E}">
         <p14:creationId xmlns:p14="http://schemas.microsoft.com/office/powerpoint/2010/main" val="3908795566"/>
-      </p:ext>
-    </p:extLst>
-  </p:cSld>
-  <p:clrMapOvr>
-    <a:masterClrMapping/>
-  </p:clrMapOvr>
-</p:sld>
-</file>
-
-<file path=ppt/slides/slide19.xml><?xml version="1.0" encoding="utf-8"?>
-<p:sld xmlns:a="http://schemas.openxmlformats.org/drawingml/2006/main" xmlns:r="http://schemas.openxmlformats.org/officeDocument/2006/relationships" xmlns:p="http://schemas.openxmlformats.org/presentationml/2006/main">
-  <p:cSld>
-    <p:spTree>
-      <p:nvGrpSpPr>
-        <p:cNvPr id="1" name="">
-          <a:extLst>
-            <a:ext uri="{FF2B5EF4-FFF2-40B4-BE49-F238E27FC236}">
-              <a16:creationId xmlns:a16="http://schemas.microsoft.com/office/drawing/2014/main" id="{A672837D-0983-0DB8-2C0B-D77EF8720A84}"/>
-            </a:ext>
-          </a:extLst>
-        </p:cNvPr>
-        <p:cNvGrpSpPr/>
-        <p:nvPr/>
-      </p:nvGrpSpPr>
-      <p:grpSpPr>
-        <a:xfrm>
-          <a:off x="0" y="0"/>
-          <a:ext cx="0" cy="0"/>
-          <a:chOff x="0" y="0"/>
-          <a:chExt cx="0" cy="0"/>
-        </a:xfrm>
-      </p:grpSpPr>
-      <p:sp>
-        <p:nvSpPr>
-          <p:cNvPr id="4" name="TextBox 3">
-            <a:extLst>
-              <a:ext uri="{FF2B5EF4-FFF2-40B4-BE49-F238E27FC236}">
-                <a16:creationId xmlns:a16="http://schemas.microsoft.com/office/drawing/2014/main" id="{A535201E-292D-8087-C6F5-C31BC38A7D76}"/>
-              </a:ext>
-            </a:extLst>
-          </p:cNvPr>
-          <p:cNvSpPr txBox="1"/>
-          <p:nvPr/>
-        </p:nvSpPr>
-        <p:spPr>
-          <a:xfrm>
-            <a:off x="292608" y="146423"/>
-            <a:ext cx="10552176" cy="2308324"/>
-          </a:xfrm>
-          <a:prstGeom prst="rect">
-            <a:avLst/>
-          </a:prstGeom>
-          <a:noFill/>
-        </p:spPr>
-        <p:txBody>
-          <a:bodyPr wrap="square">
-            <a:spAutoFit/>
-          </a:bodyPr>
-          <a:lstStyle/>
-          <a:p>
-            <a:pPr lvl="0"/>
-            <a:r>
-              <a:rPr lang="en-US" sz="2400" b="1" dirty="0">
-                <a:solidFill>
-                  <a:schemeClr val="accent6">
-                    <a:lumMod val="60000"/>
-                    <a:lumOff val="40000"/>
-                  </a:schemeClr>
-                </a:solidFill>
-              </a:rPr>
-              <a:t>4. The problem requires prediction based on incomplete information</a:t>
-            </a:r>
-            <a:endParaRPr lang="en-US" sz="2400" dirty="0">
-              <a:solidFill>
-                <a:schemeClr val="accent6">
-                  <a:lumMod val="60000"/>
-                  <a:lumOff val="40000"/>
-                </a:schemeClr>
-              </a:solidFill>
-            </a:endParaRPr>
-          </a:p>
-          <a:p>
-            <a:endParaRPr lang="en-US" sz="2400" b="1" dirty="0">
-              <a:solidFill>
-                <a:schemeClr val="accent6">
-                  <a:lumMod val="60000"/>
-                  <a:lumOff val="40000"/>
-                </a:schemeClr>
-              </a:solidFill>
-            </a:endParaRPr>
-          </a:p>
-          <a:p>
-            <a:r>
-              <a:rPr lang="en-US" sz="2400" b="1" dirty="0">
-                <a:solidFill>
-                  <a:schemeClr val="accent6">
-                    <a:lumMod val="60000"/>
-                    <a:lumOff val="40000"/>
-                  </a:schemeClr>
-                </a:solidFill>
-              </a:rPr>
-              <a:t>Example: Medical diagnosis based on symptoms and patient history</a:t>
-            </a:r>
-            <a:br>
-              <a:rPr lang="en-US" sz="2400" dirty="0">
-                <a:solidFill>
-                  <a:schemeClr val="accent6">
-                    <a:lumMod val="60000"/>
-                    <a:lumOff val="40000"/>
-                  </a:schemeClr>
-                </a:solidFill>
-              </a:rPr>
-            </a:br>
-            <a:r>
-              <a:rPr lang="en-US" sz="2400" dirty="0">
-                <a:solidFill>
-                  <a:schemeClr val="accent6">
-                    <a:lumMod val="60000"/>
-                    <a:lumOff val="40000"/>
-                  </a:schemeClr>
-                </a:solidFill>
-              </a:rPr>
-              <a:t>Symptoms may vary or be incomplete. </a:t>
-            </a:r>
-          </a:p>
-          <a:p>
-            <a:r>
-              <a:rPr lang="en-US" sz="2400" dirty="0">
-                <a:solidFill>
-                  <a:schemeClr val="accent6">
-                    <a:lumMod val="60000"/>
-                    <a:lumOff val="40000"/>
-                  </a:schemeClr>
-                </a:solidFill>
-              </a:rPr>
-              <a:t>ML models can make informed predictions based on patterns learned from prior patient data.</a:t>
-            </a:r>
-          </a:p>
-        </p:txBody>
-      </p:sp>
-    </p:spTree>
-    <p:extLst>
-      <p:ext uri="{BB962C8B-B14F-4D97-AF65-F5344CB8AC3E}">
-        <p14:creationId xmlns:p14="http://schemas.microsoft.com/office/powerpoint/2010/main" val="3156610100"/>
       </p:ext>
     </p:extLst>
   </p:cSld>
@@ -5608,6 +5872,150 @@
         <p:cNvPr id="1" name="">
           <a:extLst>
             <a:ext uri="{FF2B5EF4-FFF2-40B4-BE49-F238E27FC236}">
+              <a16:creationId xmlns:a16="http://schemas.microsoft.com/office/drawing/2014/main" id="{A672837D-0983-0DB8-2C0B-D77EF8720A84}"/>
+            </a:ext>
+          </a:extLst>
+        </p:cNvPr>
+        <p:cNvGrpSpPr/>
+        <p:nvPr/>
+      </p:nvGrpSpPr>
+      <p:grpSpPr>
+        <a:xfrm>
+          <a:off x="0" y="0"/>
+          <a:ext cx="0" cy="0"/>
+          <a:chOff x="0" y="0"/>
+          <a:chExt cx="0" cy="0"/>
+        </a:xfrm>
+      </p:grpSpPr>
+      <p:sp>
+        <p:nvSpPr>
+          <p:cNvPr id="4" name="TextBox 3">
+            <a:extLst>
+              <a:ext uri="{FF2B5EF4-FFF2-40B4-BE49-F238E27FC236}">
+                <a16:creationId xmlns:a16="http://schemas.microsoft.com/office/drawing/2014/main" id="{A535201E-292D-8087-C6F5-C31BC38A7D76}"/>
+              </a:ext>
+            </a:extLst>
+          </p:cNvPr>
+          <p:cNvSpPr txBox="1"/>
+          <p:nvPr/>
+        </p:nvSpPr>
+        <p:spPr>
+          <a:xfrm>
+            <a:off x="292608" y="146423"/>
+            <a:ext cx="10552176" cy="2308324"/>
+          </a:xfrm>
+          <a:prstGeom prst="rect">
+            <a:avLst/>
+          </a:prstGeom>
+          <a:noFill/>
+        </p:spPr>
+        <p:txBody>
+          <a:bodyPr wrap="square">
+            <a:spAutoFit/>
+          </a:bodyPr>
+          <a:lstStyle/>
+          <a:p>
+            <a:pPr lvl="0"/>
+            <a:r>
+              <a:rPr lang="en-US" sz="2400" b="1" dirty="0">
+                <a:solidFill>
+                  <a:schemeClr val="accent6">
+                    <a:lumMod val="60000"/>
+                    <a:lumOff val="40000"/>
+                  </a:schemeClr>
+                </a:solidFill>
+              </a:rPr>
+              <a:t>4. The problem requires prediction based on incomplete information</a:t>
+            </a:r>
+            <a:endParaRPr lang="en-US" sz="2400" dirty="0">
+              <a:solidFill>
+                <a:schemeClr val="accent6">
+                  <a:lumMod val="60000"/>
+                  <a:lumOff val="40000"/>
+                </a:schemeClr>
+              </a:solidFill>
+            </a:endParaRPr>
+          </a:p>
+          <a:p>
+            <a:endParaRPr lang="en-US" sz="2400" b="1" dirty="0">
+              <a:solidFill>
+                <a:schemeClr val="accent6">
+                  <a:lumMod val="60000"/>
+                  <a:lumOff val="40000"/>
+                </a:schemeClr>
+              </a:solidFill>
+            </a:endParaRPr>
+          </a:p>
+          <a:p>
+            <a:r>
+              <a:rPr lang="en-US" sz="2400" b="1" dirty="0">
+                <a:solidFill>
+                  <a:schemeClr val="accent6">
+                    <a:lumMod val="60000"/>
+                    <a:lumOff val="40000"/>
+                  </a:schemeClr>
+                </a:solidFill>
+              </a:rPr>
+              <a:t>Example: Medical diagnosis based on symptoms and patient history</a:t>
+            </a:r>
+            <a:br>
+              <a:rPr lang="en-US" sz="2400" dirty="0">
+                <a:solidFill>
+                  <a:schemeClr val="accent6">
+                    <a:lumMod val="60000"/>
+                    <a:lumOff val="40000"/>
+                  </a:schemeClr>
+                </a:solidFill>
+              </a:rPr>
+            </a:br>
+            <a:r>
+              <a:rPr lang="en-US" sz="2400" dirty="0">
+                <a:solidFill>
+                  <a:schemeClr val="accent6">
+                    <a:lumMod val="60000"/>
+                    <a:lumOff val="40000"/>
+                  </a:schemeClr>
+                </a:solidFill>
+              </a:rPr>
+              <a:t>Symptoms may vary or be incomplete. </a:t>
+            </a:r>
+          </a:p>
+          <a:p>
+            <a:r>
+              <a:rPr lang="en-US" sz="2400" dirty="0">
+                <a:solidFill>
+                  <a:schemeClr val="accent6">
+                    <a:lumMod val="60000"/>
+                    <a:lumOff val="40000"/>
+                  </a:schemeClr>
+                </a:solidFill>
+              </a:rPr>
+              <a:t>ML models can make informed predictions based on patterns learned from prior patient data.</a:t>
+            </a:r>
+          </a:p>
+        </p:txBody>
+      </p:sp>
+    </p:spTree>
+    <p:extLst>
+      <p:ext uri="{BB962C8B-B14F-4D97-AF65-F5344CB8AC3E}">
+        <p14:creationId xmlns:p14="http://schemas.microsoft.com/office/powerpoint/2010/main" val="3156610100"/>
+      </p:ext>
+    </p:extLst>
+  </p:cSld>
+  <p:clrMapOvr>
+    <a:masterClrMapping/>
+  </p:clrMapOvr>
+</p:sld>
+</file>
+
+<file path=ppt/slides/slide21.xml><?xml version="1.0" encoding="utf-8"?>
+<p:sld xmlns:a="http://schemas.openxmlformats.org/drawingml/2006/main" xmlns:r="http://schemas.openxmlformats.org/officeDocument/2006/relationships" xmlns:p="http://schemas.openxmlformats.org/presentationml/2006/main">
+  <p:cSld>
+    <p:spTree>
+      <p:nvGrpSpPr>
+        <p:cNvPr id="1" name="">
+          <a:extLst>
+            <a:ext uri="{FF2B5EF4-FFF2-40B4-BE49-F238E27FC236}">
               <a16:creationId xmlns:a16="http://schemas.microsoft.com/office/drawing/2014/main" id="{D727DB88-A273-B4DD-8668-602D17CD6D9E}"/>
             </a:ext>
           </a:extLst>
@@ -5748,7 +6156,7 @@
 </p:sld>
 </file>
 
-<file path=ppt/slides/slide21.xml><?xml version="1.0" encoding="utf-8"?>
+<file path=ppt/slides/slide22.xml><?xml version="1.0" encoding="utf-8"?>
 <p:sld xmlns:a="http://schemas.openxmlformats.org/drawingml/2006/main" xmlns:r="http://schemas.openxmlformats.org/officeDocument/2006/relationships" xmlns:p="http://schemas.openxmlformats.org/presentationml/2006/main">
   <p:cSld>
     <p:spTree>
@@ -5786,7 +6194,7 @@
         <p:spPr>
           <a:xfrm>
             <a:off x="292608" y="146423"/>
-            <a:ext cx="10552176" cy="1938992"/>
+            <a:ext cx="10552176" cy="5262979"/>
           </a:xfrm>
           <a:prstGeom prst="rect">
             <a:avLst/>
@@ -5845,6 +6253,16 @@
                 </a:solidFill>
               </a:rPr>
             </a:br>
+            <a:endParaRPr lang="en-US" sz="2400" dirty="0">
+              <a:solidFill>
+                <a:schemeClr val="accent6">
+                  <a:lumMod val="60000"/>
+                  <a:lumOff val="40000"/>
+                </a:schemeClr>
+              </a:solidFill>
+            </a:endParaRPr>
+          </a:p>
+          <a:p>
             <a:r>
               <a:rPr lang="en-US" sz="2400" dirty="0">
                 <a:solidFill>
@@ -5854,8 +6272,157 @@
                   </a:schemeClr>
                 </a:solidFill>
               </a:rPr>
-              <a:t>The system gets better over time by learning user preferences and adjusting recommendations accordingly.</a:t>
-            </a:r>
+              <a:t>The system gets better over time by </a:t>
+            </a:r>
+          </a:p>
+          <a:p>
+            <a:pPr marL="342900" indent="-342900">
+              <a:buFont typeface="Arial" panose="020B0604020202020204" pitchFamily="34" charset="0"/>
+              <a:buChar char="•"/>
+            </a:pPr>
+            <a:r>
+              <a:rPr lang="en-US" sz="2400" dirty="0">
+                <a:solidFill>
+                  <a:schemeClr val="accent6">
+                    <a:lumMod val="60000"/>
+                    <a:lumOff val="40000"/>
+                  </a:schemeClr>
+                </a:solidFill>
+              </a:rPr>
+              <a:t>learning user preferences and </a:t>
+            </a:r>
+          </a:p>
+          <a:p>
+            <a:pPr marL="342900" indent="-342900">
+              <a:buFont typeface="Arial" panose="020B0604020202020204" pitchFamily="34" charset="0"/>
+              <a:buChar char="•"/>
+            </a:pPr>
+            <a:r>
+              <a:rPr lang="en-US" sz="2400" dirty="0">
+                <a:solidFill>
+                  <a:schemeClr val="accent6">
+                    <a:lumMod val="60000"/>
+                    <a:lumOff val="40000"/>
+                  </a:schemeClr>
+                </a:solidFill>
+              </a:rPr>
+              <a:t>adjusting recommendations accordingly.</a:t>
+            </a:r>
+          </a:p>
+          <a:p>
+            <a:pPr marL="342900" indent="-342900">
+              <a:buFont typeface="Arial" panose="020B0604020202020204" pitchFamily="34" charset="0"/>
+              <a:buChar char="•"/>
+            </a:pPr>
+            <a:endParaRPr lang="en-US" sz="2400" dirty="0">
+              <a:solidFill>
+                <a:schemeClr val="accent6">
+                  <a:lumMod val="60000"/>
+                  <a:lumOff val="40000"/>
+                </a:schemeClr>
+              </a:solidFill>
+            </a:endParaRPr>
+          </a:p>
+          <a:p>
+            <a:pPr marL="342900" indent="-342900">
+              <a:buFont typeface="Arial" panose="020B0604020202020204" pitchFamily="34" charset="0"/>
+              <a:buChar char="•"/>
+            </a:pPr>
+            <a:endParaRPr lang="en-US" sz="2400" dirty="0">
+              <a:solidFill>
+                <a:schemeClr val="accent6">
+                  <a:lumMod val="60000"/>
+                  <a:lumOff val="40000"/>
+                </a:schemeClr>
+              </a:solidFill>
+            </a:endParaRPr>
+          </a:p>
+          <a:p>
+            <a:r>
+              <a:rPr lang="en-US" sz="2400" b="1" dirty="0">
+                <a:solidFill>
+                  <a:schemeClr val="accent6">
+                    <a:lumMod val="60000"/>
+                    <a:lumOff val="40000"/>
+                  </a:schemeClr>
+                </a:solidFill>
+              </a:rPr>
+              <a:t>Real-World Success:</a:t>
+            </a:r>
+            <a:endParaRPr lang="en-US" sz="2400" dirty="0">
+              <a:solidFill>
+                <a:schemeClr val="accent6">
+                  <a:lumMod val="60000"/>
+                  <a:lumOff val="40000"/>
+                </a:schemeClr>
+              </a:solidFill>
+            </a:endParaRPr>
+          </a:p>
+          <a:p>
+            <a:pPr marL="342900" indent="-342900">
+              <a:buFont typeface="Arial" panose="020B0604020202020204" pitchFamily="34" charset="0"/>
+              <a:buChar char="•"/>
+            </a:pPr>
+            <a:r>
+              <a:rPr lang="en-US" sz="2400" b="1" dirty="0">
+                <a:solidFill>
+                  <a:schemeClr val="accent6">
+                    <a:lumMod val="60000"/>
+                    <a:lumOff val="40000"/>
+                  </a:schemeClr>
+                </a:solidFill>
+              </a:rPr>
+              <a:t>Netflix</a:t>
+            </a:r>
+            <a:r>
+              <a:rPr lang="en-US" sz="2400" dirty="0">
+                <a:solidFill>
+                  <a:schemeClr val="accent6">
+                    <a:lumMod val="60000"/>
+                    <a:lumOff val="40000"/>
+                  </a:schemeClr>
+                </a:solidFill>
+              </a:rPr>
+              <a:t> credits its recommendation engine with saving over $1 billion annually through improved retention</a:t>
+            </a:r>
+          </a:p>
+          <a:p>
+            <a:pPr marL="342900" indent="-342900">
+              <a:buFont typeface="Arial" panose="020B0604020202020204" pitchFamily="34" charset="0"/>
+              <a:buChar char="•"/>
+            </a:pPr>
+            <a:r>
+              <a:rPr lang="en-US" sz="2400" b="1" dirty="0">
+                <a:solidFill>
+                  <a:schemeClr val="accent6">
+                    <a:lumMod val="60000"/>
+                    <a:lumOff val="40000"/>
+                  </a:schemeClr>
+                </a:solidFill>
+              </a:rPr>
+              <a:t>Amazon</a:t>
+            </a:r>
+            <a:r>
+              <a:rPr lang="en-US" sz="2400" dirty="0">
+                <a:solidFill>
+                  <a:schemeClr val="accent6">
+                    <a:lumMod val="60000"/>
+                    <a:lumOff val="40000"/>
+                  </a:schemeClr>
+                </a:solidFill>
+              </a:rPr>
+              <a:t> generates 35% of its revenue from its recommendation system</a:t>
+            </a:r>
+          </a:p>
+          <a:p>
+            <a:endParaRPr lang="en-US" sz="2400" dirty="0">
+              <a:solidFill>
+                <a:schemeClr val="accent6">
+                  <a:lumMod val="60000"/>
+                  <a:lumOff val="40000"/>
+                </a:schemeClr>
+              </a:solidFill>
+            </a:endParaRPr>
           </a:p>
         </p:txBody>
       </p:sp>
@@ -5872,7 +6439,7 @@
 </p:sld>
 </file>
 
-<file path=ppt/slides/slide22.xml><?xml version="1.0" encoding="utf-8"?>
+<file path=ppt/slides/slide23.xml><?xml version="1.0" encoding="utf-8"?>
 <p:sld xmlns:a="http://schemas.openxmlformats.org/drawingml/2006/main" xmlns:r="http://schemas.openxmlformats.org/officeDocument/2006/relationships" xmlns:p="http://schemas.openxmlformats.org/presentationml/2006/main">
   <p:cSld>
     <p:spTree>
@@ -5910,7 +6477,7 @@
         <p:spPr>
           <a:xfrm>
             <a:off x="292608" y="146423"/>
-            <a:ext cx="10552176" cy="3416320"/>
+            <a:ext cx="10552176" cy="3785652"/>
           </a:xfrm>
           <a:prstGeom prst="rect">
             <a:avLst/>
@@ -5933,7 +6500,7 @@
                   </a:schemeClr>
                 </a:solidFill>
               </a:rPr>
-              <a:t>Approximation is acceptable</a:t>
+              <a:t>7. Approximation is acceptable</a:t>
             </a:r>
             <a:r>
               <a:rPr lang="en-US" sz="2400" dirty="0">
@@ -5970,7 +6537,22 @@
               </a:rPr>
               <a:t>Example: Language translation (e.g., Google Translate)</a:t>
             </a:r>
-            <a:br>
+          </a:p>
+          <a:p>
+            <a:r>
+              <a:rPr lang="en-US" sz="2400" u="sng" dirty="0">
+                <a:solidFill>
+                  <a:schemeClr val="accent6">
+                    <a:lumMod val="60000"/>
+                    <a:lumOff val="40000"/>
+                  </a:schemeClr>
+                </a:solidFill>
+              </a:rPr>
+              <a:t>Perfect translation is impossible.</a:t>
+            </a:r>
+          </a:p>
+          <a:p>
+            <a:r>
               <a:rPr lang="en-US" sz="2400" dirty="0">
                 <a:solidFill>
                   <a:schemeClr val="accent6">
@@ -5979,21 +6561,11 @@
                   </a:schemeClr>
                 </a:solidFill>
               </a:rPr>
-            </a:br>
-            <a:r>
-              <a:rPr lang="en-US" sz="2400" dirty="0">
-                <a:solidFill>
-                  <a:schemeClr val="accent6">
-                    <a:lumMod val="60000"/>
-                    <a:lumOff val="40000"/>
-                  </a:schemeClr>
-                </a:solidFill>
-              </a:rPr>
-              <a:t>It's often better to have an approximate translation than none at all, especially across languages where perfect translation is impossible.</a:t>
-            </a:r>
-          </a:p>
-          <a:p>
-            <a:endParaRPr lang="en-US" sz="2400" dirty="0">
+              <a:t>Here it's better to have an approximate translation than none at all, especially across languages.</a:t>
+            </a:r>
+          </a:p>
+          <a:p>
+            <a:endParaRPr lang="en-US" sz="2400" b="1" dirty="0">
               <a:solidFill>
                 <a:schemeClr val="accent6">
                   <a:lumMod val="60000"/>
